--- a/slides/法定研修制度改正への対応と主任ケアマネ更新研修の戦略.pptx
+++ b/slides/法定研修制度改正への対応と主任ケアマネ更新研修の戦略.pptx
@@ -25,6 +25,7 @@
     <p:sldId id="273" r:id="rId24"/>
     <p:sldId id="274" r:id="rId25"/>
     <p:sldId id="275" r:id="rId26"/>
+    <p:sldId id="276" r:id="rId27"/>
   </p:sldIdLst>
   <p:sldSz cx="12191695" cy="6858000" type="screen4x3"/>
   <p:notesSz cx="6858000" cy="9144000"/>
@@ -3713,7 +3714,7 @@
                 </a:solidFill>
                 <a:latin typeface="Yu Gothic"/>
               </a:rPr>
-              <a:t>10 / 20</a:t>
+              <a:t>10 / 21</a:t>
             </a:r>
           </a:p>
         </p:txBody>
@@ -4845,7 +4846,7 @@
                 </a:solidFill>
                 <a:latin typeface="Yu Gothic"/>
               </a:rPr>
-              <a:t>11 / 20</a:t>
+              <a:t>11 / 21</a:t>
             </a:r>
           </a:p>
         </p:txBody>
@@ -5918,7 +5919,7 @@
                 </a:solidFill>
                 <a:latin typeface="Yu Gothic"/>
               </a:rPr>
-              <a:t>キャリアパスの設計例</a:t>
+              <a:t>キャリアパスの設計例（事業所モデルの一例）</a:t>
             </a:r>
           </a:p>
         </p:txBody>
@@ -6032,7 +6033,7 @@
                 </a:solidFill>
                 <a:latin typeface="Yu Gothic"/>
               </a:rPr>
-              <a:t>12 / 20</a:t>
+              <a:t>12 / 21</a:t>
             </a:r>
           </a:p>
         </p:txBody>
@@ -6081,17 +6082,52 @@
           </a:p>
         </p:txBody>
       </p:sp>
+      <p:sp>
+        <p:nvSpPr>
+          <p:cNvPr id="9" name="TextBox 8"/>
+          <p:cNvSpPr txBox="1"/>
+          <p:nvPr/>
+        </p:nvSpPr>
+        <p:spPr>
+          <a:xfrm>
+            <a:off x="731520" y="1325880"/>
+            <a:ext cx="10698480" cy="320040"/>
+          </a:xfrm>
+          <a:prstGeom prst="rect">
+            <a:avLst/>
+          </a:prstGeom>
+          <a:noFill/>
+        </p:spPr>
+        <p:txBody>
+          <a:bodyPr wrap="square" lIns="0" rIns="0" tIns="0" bIns="0" anchor="t">
+            <a:spAutoFit/>
+          </a:bodyPr>
+          <a:lstStyle/>
+          <a:p>
+            <a:pPr algn="l"/>
+            <a:r>
+              <a:rPr sz="1100" b="0">
+                <a:solidFill>
+                  <a:srgbClr val="5A6B80"/>
+                </a:solidFill>
+                <a:latin typeface="Yu Gothic"/>
+              </a:rPr>
+              <a:t>※下記の経験年数・段階区分は事業所内モデルの例であり、法令上の基準ではありません。</a:t>
+            </a:r>
+          </a:p>
+        </p:txBody>
+      </p:sp>
       <p:graphicFrame>
         <p:nvGraphicFramePr>
-          <p:cNvPr id="9" name="Table 8"/>
+          <p:cNvPr id="10" name="Table 9"/>
           <p:cNvGraphicFramePr>
             <a:graphicFrameLocks noGrp="1"/>
           </p:cNvGraphicFramePr>
           <p:nvPr/>
         </p:nvGraphicFramePr>
         <p:xfrm>
-          <a:off x="731520" y="1417320"/>
-          <a:ext cx="10698478" cy="2743200"/>
+          <a:off x="731520" y="1691640"/>
+          <a:ext cx="10698478" cy="2560320"/>
         </p:xfrm>
         <a:graphic>
           <a:graphicData uri="http://schemas.openxmlformats.org/drawingml/2006/table">
@@ -6105,7 +6141,7 @@
                 <a:gridCol w="3890356"/>
                 <a:gridCol w="3890356"/>
               </a:tblGrid>
-              <a:tr h="457200">
+              <a:tr h="426720">
                 <a:tc>
                   <a:txBody>
                     <a:bodyPr wrap="square"/>
@@ -6140,7 +6176,7 @@
                           </a:solidFill>
                           <a:latin typeface="Yu Gothic"/>
                         </a:rPr>
-                        <a:t>経験年数</a:t>
+                        <a:t>経験年数（例）</a:t>
                       </a:r>
                     </a:p>
                   </a:txBody>
@@ -6195,7 +6231,7 @@
                   </a:tcPr>
                 </a:tc>
               </a:tr>
-              <a:tr h="457200">
+              <a:tr h="426720">
                 <a:tc>
                   <a:txBody>
                     <a:bodyPr wrap="square"/>
@@ -6285,7 +6321,7 @@
                   </a:tcPr>
                 </a:tc>
               </a:tr>
-              <a:tr h="457200">
+              <a:tr h="426720">
                 <a:tc>
                   <a:txBody>
                     <a:bodyPr wrap="square"/>
@@ -6375,7 +6411,7 @@
                   </a:tcPr>
                 </a:tc>
               </a:tr>
-              <a:tr h="457200">
+              <a:tr h="426720">
                 <a:tc>
                   <a:txBody>
                     <a:bodyPr wrap="square"/>
@@ -6465,7 +6501,7 @@
                   </a:tcPr>
                 </a:tc>
               </a:tr>
-              <a:tr h="457200">
+              <a:tr h="426720">
                 <a:tc>
                   <a:txBody>
                     <a:bodyPr wrap="square"/>
@@ -6555,7 +6591,7 @@
                   </a:tcPr>
                 </a:tc>
               </a:tr>
-              <a:tr h="457200">
+              <a:tr h="426720">
                 <a:tc>
                   <a:txBody>
                     <a:bodyPr wrap="square"/>
@@ -6651,7 +6687,7 @@
       </p:graphicFrame>
       <p:sp>
         <p:nvSpPr>
-          <p:cNvPr id="10" name="TextBox 9"/>
+          <p:cNvPr id="11" name="TextBox 10"/>
           <p:cNvSpPr txBox="1"/>
           <p:nvPr/>
         </p:nvSpPr>
@@ -6686,7 +6722,7 @@
       </p:sp>
       <p:sp>
         <p:nvSpPr>
-          <p:cNvPr id="11" name="TextBox 10"/>
+          <p:cNvPr id="12" name="TextBox 11"/>
           <p:cNvSpPr txBox="1"/>
           <p:nvPr/>
         </p:nvSpPr>
@@ -7007,7 +7043,7 @@
                 </a:solidFill>
                 <a:latin typeface="Yu Gothic"/>
               </a:rPr>
-              <a:t>13 / 20</a:t>
+              <a:t>13 / 21</a:t>
             </a:r>
           </a:p>
         </p:txBody>
@@ -8154,7 +8190,7 @@
                 </a:solidFill>
                 <a:latin typeface="Yu Gothic"/>
               </a:rPr>
-              <a:t>14 / 20</a:t>
+              <a:t>14 / 21</a:t>
             </a:r>
           </a:p>
         </p:txBody>
@@ -8644,7 +8680,7 @@
                 </a:solidFill>
                 <a:latin typeface="Yu Gothic"/>
               </a:rPr>
-              <a:t>主任研修修了者への処遇加算</a:t>
+              <a:t>主任研修修了者への資格手当・役割手当等（事業所内処遇）</a:t>
             </a:r>
           </a:p>
         </p:txBody>
@@ -9345,7 +9381,7 @@
                 </a:solidFill>
                 <a:latin typeface="Yu Gothic"/>
               </a:rPr>
-              <a:t>15 / 20</a:t>
+              <a:t>15 / 21</a:t>
             </a:r>
           </a:p>
         </p:txBody>
@@ -10564,7 +10600,7 @@
                 </a:solidFill>
                 <a:latin typeface="Yu Gothic"/>
               </a:rPr>
-              <a:t>OJT実績そのものが主任更新研修の受講要件（指導実績）になる</a:t>
+              <a:t>OJT・事例検討・研修企画等の実績は、都道府県の受講要件や実績確認に関連する場合がある</a:t>
             </a:r>
           </a:p>
           <a:p>
@@ -10844,7 +10880,7 @@
                 </a:solidFill>
                 <a:latin typeface="Yu Gothic"/>
               </a:rPr>
-              <a:t>16 / 20</a:t>
+              <a:t>16 / 21</a:t>
             </a:r>
           </a:p>
         </p:txBody>
@@ -11870,7 +11906,7 @@
                 </a:solidFill>
                 <a:latin typeface="Yu Gothic"/>
               </a:rPr>
-              <a:t>17 / 20</a:t>
+              <a:t>17 / 21</a:t>
             </a:r>
           </a:p>
         </p:txBody>
@@ -12366,7 +12402,7 @@
                 </a:solidFill>
                 <a:latin typeface="Yu Gothic"/>
               </a:rPr>
-              <a:t>地域ケア会議の事例提供や講師経験は、主任更新研修の要件として求められる「指導・地域貢献の実績」に直結する。</a:t>
+              <a:t>地域ケア会議の事例提供や講師経験、法定外研修への参加等は、都道府県によっては主任更新研修の受講要件・実績確認に関連する場合がある。所管自治体の要綱を確認のこと。</a:t>
             </a:r>
           </a:p>
         </p:txBody>
@@ -12507,7 +12543,7 @@
                 </a:solidFill>
                 <a:latin typeface="Yu Gothic"/>
               </a:rPr>
-              <a:t>第5章　実践事例　A居宅介護支援事業所</a:t>
+              <a:t>第5章　モデルケース　A居宅介護支援事業所（架空事例）</a:t>
             </a:r>
           </a:p>
         </p:txBody>
@@ -12586,7 +12622,7 @@
                 </a:solidFill>
                 <a:latin typeface="Yu Gothic"/>
               </a:rPr>
-              <a:t>第5章　実践事例</a:t>
+              <a:t>第5章　モデルケース</a:t>
             </a:r>
           </a:p>
         </p:txBody>
@@ -12621,7 +12657,7 @@
                 </a:solidFill>
                 <a:latin typeface="Yu Gothic"/>
               </a:rPr>
-              <a:t>18 / 20</a:t>
+              <a:t>18 / 21</a:t>
             </a:r>
           </a:p>
         </p:txBody>
@@ -12672,14 +12708,49 @@
       </p:sp>
       <p:sp>
         <p:nvSpPr>
-          <p:cNvPr id="9" name="Rectangle 8"/>
+          <p:cNvPr id="9" name="TextBox 8"/>
+          <p:cNvSpPr txBox="1"/>
+          <p:nvPr/>
+        </p:nvSpPr>
+        <p:spPr>
+          <a:xfrm>
+            <a:off x="731520" y="1325880"/>
+            <a:ext cx="10698480" cy="320040"/>
+          </a:xfrm>
+          <a:prstGeom prst="rect">
+            <a:avLst/>
+          </a:prstGeom>
+          <a:noFill/>
+        </p:spPr>
+        <p:txBody>
+          <a:bodyPr wrap="square" lIns="0" rIns="0" tIns="0" bIns="0" anchor="t">
+            <a:spAutoFit/>
+          </a:bodyPr>
+          <a:lstStyle/>
+          <a:p>
+            <a:pPr algn="l"/>
+            <a:r>
+              <a:rPr sz="1100" b="0">
+                <a:solidFill>
+                  <a:srgbClr val="5A6B80"/>
+                </a:solidFill>
+                <a:latin typeface="Yu Gothic"/>
+              </a:rPr>
+              <a:t>※本事例は、本資料の解説を目的としたモデルケースであり、特定の事業所の実績ではありません。</a:t>
+            </a:r>
+          </a:p>
+        </p:txBody>
+      </p:sp>
+      <p:sp>
+        <p:nvSpPr>
+          <p:cNvPr id="10" name="Rectangle 9"/>
           <p:cNvSpPr/>
           <p:nvPr/>
         </p:nvSpPr>
         <p:spPr>
           <a:xfrm>
-            <a:off x="731520" y="1417320"/>
-            <a:ext cx="5349240" cy="1645920"/>
+            <a:off x="731520" y="1691640"/>
+            <a:ext cx="5349240" cy="1554480"/>
           </a:xfrm>
           <a:prstGeom prst="rect">
             <a:avLst/>
@@ -12718,14 +12789,14 @@
       </p:sp>
       <p:sp>
         <p:nvSpPr>
-          <p:cNvPr id="10" name="Rectangle 9"/>
+          <p:cNvPr id="11" name="Rectangle 10"/>
           <p:cNvSpPr/>
           <p:nvPr/>
         </p:nvSpPr>
         <p:spPr>
           <a:xfrm>
-            <a:off x="731520" y="1417320"/>
-            <a:ext cx="45720" cy="1645920"/>
+            <a:off x="731520" y="1691640"/>
+            <a:ext cx="45720" cy="1554480"/>
           </a:xfrm>
           <a:prstGeom prst="rect">
             <a:avLst/>
@@ -12762,13 +12833,13 @@
       </p:sp>
       <p:sp>
         <p:nvSpPr>
-          <p:cNvPr id="11" name="TextBox 10"/>
+          <p:cNvPr id="12" name="TextBox 11"/>
           <p:cNvSpPr txBox="1"/>
           <p:nvPr/>
         </p:nvSpPr>
         <p:spPr>
           <a:xfrm>
-            <a:off x="960120" y="1527048"/>
+            <a:off x="960120" y="1801368"/>
             <a:ext cx="4983480" cy="365760"/>
           </a:xfrm>
           <a:prstGeom prst="rect">
@@ -12790,21 +12861,21 @@
                 </a:solidFill>
                 <a:latin typeface="Yu Gothic"/>
               </a:rPr>
-              <a:t>事業所プロフィール</a:t>
-            </a:r>
-          </a:p>
-        </p:txBody>
-      </p:sp>
-      <p:sp>
-        <p:nvSpPr>
-          <p:cNvPr id="12" name="TextBox 11"/>
+              <a:t>事業所プロフィール（モデル）</a:t>
+            </a:r>
+          </a:p>
+        </p:txBody>
+      </p:sp>
+      <p:sp>
+        <p:nvSpPr>
+          <p:cNvPr id="13" name="TextBox 12"/>
           <p:cNvSpPr txBox="1"/>
           <p:nvPr/>
         </p:nvSpPr>
         <p:spPr>
           <a:xfrm>
-            <a:off x="960120" y="1920240"/>
-            <a:ext cx="4983480" cy="1051560"/>
+            <a:off x="960120" y="2194560"/>
+            <a:ext cx="4983480" cy="960120"/>
           </a:xfrm>
           <a:prstGeom prst="rect">
             <a:avLst/>
@@ -12895,14 +12966,14 @@
       </p:sp>
       <p:sp>
         <p:nvSpPr>
-          <p:cNvPr id="13" name="Rectangle 12"/>
+          <p:cNvPr id="14" name="Rectangle 13"/>
           <p:cNvSpPr/>
           <p:nvPr/>
         </p:nvSpPr>
         <p:spPr>
           <a:xfrm>
-            <a:off x="6126480" y="1417320"/>
-            <a:ext cx="5349240" cy="1645920"/>
+            <a:off x="6126480" y="1691640"/>
+            <a:ext cx="5349240" cy="1554480"/>
           </a:xfrm>
           <a:prstGeom prst="rect">
             <a:avLst/>
@@ -12941,14 +13012,14 @@
       </p:sp>
       <p:sp>
         <p:nvSpPr>
-          <p:cNvPr id="14" name="Rectangle 13"/>
+          <p:cNvPr id="15" name="Rectangle 14"/>
           <p:cNvSpPr/>
           <p:nvPr/>
         </p:nvSpPr>
         <p:spPr>
           <a:xfrm>
-            <a:off x="6126480" y="1417320"/>
-            <a:ext cx="45720" cy="1645920"/>
+            <a:off x="6126480" y="1691640"/>
+            <a:ext cx="45720" cy="1554480"/>
           </a:xfrm>
           <a:prstGeom prst="rect">
             <a:avLst/>
@@ -12985,13 +13056,13 @@
       </p:sp>
       <p:sp>
         <p:nvSpPr>
-          <p:cNvPr id="15" name="TextBox 14"/>
+          <p:cNvPr id="16" name="TextBox 15"/>
           <p:cNvSpPr txBox="1"/>
           <p:nvPr/>
         </p:nvSpPr>
         <p:spPr>
           <a:xfrm>
-            <a:off x="6355080" y="1527048"/>
+            <a:off x="6355080" y="1801368"/>
             <a:ext cx="4983480" cy="365760"/>
           </a:xfrm>
           <a:prstGeom prst="rect">
@@ -13013,21 +13084,21 @@
                 </a:solidFill>
                 <a:latin typeface="Yu Gothic"/>
               </a:rPr>
-              <a:t>取り組み前の課題</a:t>
-            </a:r>
-          </a:p>
-        </p:txBody>
-      </p:sp>
-      <p:sp>
-        <p:nvSpPr>
-          <p:cNvPr id="16" name="TextBox 15"/>
+              <a:t>取り組み前の課題（モデル）</a:t>
+            </a:r>
+          </a:p>
+        </p:txBody>
+      </p:sp>
+      <p:sp>
+        <p:nvSpPr>
+          <p:cNvPr id="17" name="TextBox 16"/>
           <p:cNvSpPr txBox="1"/>
           <p:nvPr/>
         </p:nvSpPr>
         <p:spPr>
           <a:xfrm>
-            <a:off x="6355080" y="1920240"/>
-            <a:ext cx="4983480" cy="1051560"/>
+            <a:off x="6355080" y="2194560"/>
+            <a:ext cx="4983480" cy="960120"/>
           </a:xfrm>
           <a:prstGeom prst="rect">
             <a:avLst/>
@@ -13118,13 +13189,13 @@
       </p:sp>
       <p:sp>
         <p:nvSpPr>
-          <p:cNvPr id="17" name="TextBox 16"/>
+          <p:cNvPr id="18" name="TextBox 17"/>
           <p:cNvSpPr txBox="1"/>
           <p:nvPr/>
         </p:nvSpPr>
         <p:spPr>
           <a:xfrm>
-            <a:off x="731520" y="3291840"/>
+            <a:off x="731520" y="3429000"/>
             <a:ext cx="10698480" cy="365760"/>
           </a:xfrm>
           <a:prstGeom prst="rect">
@@ -13153,13 +13224,13 @@
       </p:sp>
       <p:sp>
         <p:nvSpPr>
-          <p:cNvPr id="18" name="TextBox 17"/>
+          <p:cNvPr id="19" name="TextBox 18"/>
           <p:cNvSpPr txBox="1"/>
           <p:nvPr/>
         </p:nvSpPr>
         <p:spPr>
           <a:xfrm>
-            <a:off x="822960" y="3749039"/>
+            <a:off x="822960" y="3886200"/>
             <a:ext cx="10515600" cy="1371600"/>
           </a:xfrm>
           <a:prstGeom prst="rect">
@@ -13251,13 +13322,13 @@
       </p:sp>
       <p:sp>
         <p:nvSpPr>
-          <p:cNvPr id="19" name="Rectangle 18"/>
+          <p:cNvPr id="20" name="Rectangle 19"/>
           <p:cNvSpPr/>
           <p:nvPr/>
         </p:nvSpPr>
         <p:spPr>
           <a:xfrm>
-            <a:off x="731520" y="5212080"/>
+            <a:off x="731520" y="5349240"/>
             <a:ext cx="10698480" cy="868680"/>
           </a:xfrm>
           <a:prstGeom prst="rect">
@@ -13295,13 +13366,13 @@
       </p:sp>
       <p:sp>
         <p:nvSpPr>
-          <p:cNvPr id="20" name="Rectangle 19"/>
+          <p:cNvPr id="21" name="Rectangle 20"/>
           <p:cNvSpPr/>
           <p:nvPr/>
         </p:nvSpPr>
         <p:spPr>
           <a:xfrm>
-            <a:off x="731520" y="5212080"/>
+            <a:off x="731520" y="5349240"/>
             <a:ext cx="45720" cy="868680"/>
           </a:xfrm>
           <a:prstGeom prst="rect">
@@ -13339,13 +13410,13 @@
       </p:sp>
       <p:sp>
         <p:nvSpPr>
-          <p:cNvPr id="21" name="TextBox 20"/>
+          <p:cNvPr id="22" name="TextBox 21"/>
           <p:cNvSpPr txBox="1"/>
           <p:nvPr/>
         </p:nvSpPr>
         <p:spPr>
           <a:xfrm>
-            <a:off x="960120" y="5349240"/>
+            <a:off x="960120" y="5486400"/>
             <a:ext cx="10332720" cy="685800"/>
           </a:xfrm>
           <a:prstGeom prst="rect">
@@ -13371,7 +13442,7 @@
                 </a:solidFill>
                 <a:latin typeface="Yu Gothic"/>
               </a:rPr>
-              <a:t>結果：</a:t>
+              <a:t>想定される効果（モデル）：</a:t>
             </a:r>
             <a:r>
               <a:rPr sz="1400" b="0">
@@ -13380,7 +13451,7 @@
                 </a:solidFill>
                 <a:latin typeface="Yu Gothic"/>
               </a:rPr>
-              <a:t>3年間で受講率100％／離職率低下／主任更新の取りこぼしゼロ／特定事業所加算の維持</a:t>
+              <a:t>受講機会の確実な確保／主任更新の取りこぼし防止／加算要件の安定的維持／OJT標準化による定着率改善</a:t>
             </a:r>
           </a:p>
         </p:txBody>
@@ -13600,7 +13671,7 @@
                 </a:solidFill>
                 <a:latin typeface="Yu Gothic"/>
               </a:rPr>
-              <a:t>第5章　実践事例</a:t>
+              <a:t>第5章　モデルケース</a:t>
             </a:r>
           </a:p>
         </p:txBody>
@@ -13635,7 +13706,7 @@
                 </a:solidFill>
                 <a:latin typeface="Yu Gothic"/>
               </a:rPr>
-              <a:t>19 / 20</a:t>
+              <a:t>19 / 21</a:t>
             </a:r>
           </a:p>
         </p:txBody>
@@ -14826,7 +14897,7 @@
                 </a:solidFill>
                 <a:latin typeface="Yu Gothic"/>
               </a:rPr>
-              <a:t>2 / 20</a:t>
+              <a:t>2 / 21</a:t>
             </a:r>
           </a:p>
         </p:txBody>
@@ -15439,7 +15510,7 @@
             <a:avLst/>
           </a:prstGeom>
           <a:solidFill>
-            <a:srgbClr val="0F4C81"/>
+            <a:srgbClr val="F5F7FA"/>
           </a:solidFill>
           <a:ln>
             <a:noFill/>
@@ -15476,8 +15547,8 @@
         </p:nvSpPr>
         <p:spPr>
           <a:xfrm>
-            <a:off x="0" y="6492240"/>
-            <a:ext cx="12191695" cy="365760"/>
+            <a:off x="502920" y="502920"/>
+            <a:ext cx="109728" cy="594360"/>
           </a:xfrm>
           <a:prstGeom prst="rect">
             <a:avLst/>
@@ -15520,6 +15591,707 @@
         </p:nvSpPr>
         <p:spPr>
           <a:xfrm>
+            <a:off x="731520" y="457200"/>
+            <a:ext cx="10515600" cy="731520"/>
+          </a:xfrm>
+          <a:prstGeom prst="rect">
+            <a:avLst/>
+          </a:prstGeom>
+          <a:noFill/>
+        </p:spPr>
+        <p:txBody>
+          <a:bodyPr wrap="square" lIns="0" rIns="0" tIns="0" bIns="0" anchor="t">
+            <a:spAutoFit/>
+          </a:bodyPr>
+          <a:lstStyle/>
+          <a:p>
+            <a:pPr algn="l"/>
+            <a:r>
+              <a:rPr sz="2800" b="1">
+                <a:solidFill>
+                  <a:srgbClr val="0F4C81"/>
+                </a:solidFill>
+                <a:latin typeface="Yu Gothic"/>
+              </a:rPr>
+              <a:t>本資料の根拠と利用上の注意</a:t>
+            </a:r>
+          </a:p>
+        </p:txBody>
+      </p:sp>
+      <p:sp>
+        <p:nvSpPr>
+          <p:cNvPr id="5" name="Rectangle 4"/>
+          <p:cNvSpPr/>
+          <p:nvPr/>
+        </p:nvSpPr>
+        <p:spPr>
+          <a:xfrm>
+            <a:off x="502920" y="1170432"/>
+            <a:ext cx="11155680" cy="36576"/>
+          </a:xfrm>
+          <a:prstGeom prst="rect">
+            <a:avLst/>
+          </a:prstGeom>
+          <a:solidFill>
+            <a:srgbClr val="0F4C81"/>
+          </a:solidFill>
+          <a:ln>
+            <a:noFill/>
+          </a:ln>
+          <a:effectLst/>
+        </p:spPr>
+        <p:style>
+          <a:lnRef idx="1">
+            <a:schemeClr val="accent1"/>
+          </a:lnRef>
+          <a:fillRef idx="3">
+            <a:schemeClr val="accent1"/>
+          </a:fillRef>
+          <a:effectRef idx="2">
+            <a:schemeClr val="accent1"/>
+          </a:effectRef>
+          <a:fontRef idx="minor">
+            <a:schemeClr val="lt1"/>
+          </a:fontRef>
+        </p:style>
+        <p:txBody>
+          <a:bodyPr rtlCol="0" anchor="ctr"/>
+          <a:lstStyle/>
+          <a:p>
+            <a:pPr algn="ctr"/>
+          </a:p>
+        </p:txBody>
+      </p:sp>
+      <p:sp>
+        <p:nvSpPr>
+          <p:cNvPr id="6" name="TextBox 5"/>
+          <p:cNvSpPr txBox="1"/>
+          <p:nvPr/>
+        </p:nvSpPr>
+        <p:spPr>
+          <a:xfrm>
+            <a:off x="502920" y="6446520"/>
+            <a:ext cx="7315200" cy="274320"/>
+          </a:xfrm>
+          <a:prstGeom prst="rect">
+            <a:avLst/>
+          </a:prstGeom>
+          <a:noFill/>
+        </p:spPr>
+        <p:txBody>
+          <a:bodyPr wrap="square" lIns="0" rIns="0" tIns="0" bIns="0" anchor="t">
+            <a:spAutoFit/>
+          </a:bodyPr>
+          <a:lstStyle/>
+          <a:p>
+            <a:pPr algn="l"/>
+            <a:r>
+              <a:rPr sz="1000" b="0">
+                <a:solidFill>
+                  <a:srgbClr val="5A6B80"/>
+                </a:solidFill>
+                <a:latin typeface="Yu Gothic"/>
+              </a:rPr>
+              <a:t>出典・注記</a:t>
+            </a:r>
+          </a:p>
+        </p:txBody>
+      </p:sp>
+      <p:sp>
+        <p:nvSpPr>
+          <p:cNvPr id="7" name="TextBox 6"/>
+          <p:cNvSpPr txBox="1"/>
+          <p:nvPr/>
+        </p:nvSpPr>
+        <p:spPr>
+          <a:xfrm>
+            <a:off x="10515600" y="6446520"/>
+            <a:ext cx="1188720" cy="274320"/>
+          </a:xfrm>
+          <a:prstGeom prst="rect">
+            <a:avLst/>
+          </a:prstGeom>
+          <a:noFill/>
+        </p:spPr>
+        <p:txBody>
+          <a:bodyPr wrap="square" lIns="0" rIns="0" tIns="0" bIns="0" anchor="t">
+            <a:spAutoFit/>
+          </a:bodyPr>
+          <a:lstStyle/>
+          <a:p>
+            <a:pPr algn="r"/>
+            <a:r>
+              <a:rPr sz="1000" b="1">
+                <a:solidFill>
+                  <a:srgbClr val="0F4C81"/>
+                </a:solidFill>
+                <a:latin typeface="Yu Gothic"/>
+              </a:rPr>
+              <a:t>20 / 21</a:t>
+            </a:r>
+          </a:p>
+        </p:txBody>
+      </p:sp>
+      <p:sp>
+        <p:nvSpPr>
+          <p:cNvPr id="8" name="Rectangle 7"/>
+          <p:cNvSpPr/>
+          <p:nvPr/>
+        </p:nvSpPr>
+        <p:spPr>
+          <a:xfrm>
+            <a:off x="502920" y="6400800"/>
+            <a:ext cx="11155680" cy="13716"/>
+          </a:xfrm>
+          <a:prstGeom prst="rect">
+            <a:avLst/>
+          </a:prstGeom>
+          <a:solidFill>
+            <a:srgbClr val="D9E1EC"/>
+          </a:solidFill>
+          <a:ln>
+            <a:noFill/>
+          </a:ln>
+          <a:effectLst/>
+        </p:spPr>
+        <p:style>
+          <a:lnRef idx="1">
+            <a:schemeClr val="accent1"/>
+          </a:lnRef>
+          <a:fillRef idx="3">
+            <a:schemeClr val="accent1"/>
+          </a:fillRef>
+          <a:effectRef idx="2">
+            <a:schemeClr val="accent1"/>
+          </a:effectRef>
+          <a:fontRef idx="minor">
+            <a:schemeClr val="lt1"/>
+          </a:fontRef>
+        </p:style>
+        <p:txBody>
+          <a:bodyPr rtlCol="0" anchor="ctr"/>
+          <a:lstStyle/>
+          <a:p>
+            <a:pPr algn="ctr"/>
+          </a:p>
+        </p:txBody>
+      </p:sp>
+      <p:sp>
+        <p:nvSpPr>
+          <p:cNvPr id="9" name="TextBox 8"/>
+          <p:cNvSpPr txBox="1"/>
+          <p:nvPr/>
+        </p:nvSpPr>
+        <p:spPr>
+          <a:xfrm>
+            <a:off x="731520" y="1417320"/>
+            <a:ext cx="10698480" cy="365760"/>
+          </a:xfrm>
+          <a:prstGeom prst="rect">
+            <a:avLst/>
+          </a:prstGeom>
+          <a:noFill/>
+        </p:spPr>
+        <p:txBody>
+          <a:bodyPr wrap="square" lIns="0" rIns="0" tIns="0" bIns="0" anchor="t">
+            <a:spAutoFit/>
+          </a:bodyPr>
+          <a:lstStyle/>
+          <a:p>
+            <a:pPr algn="l"/>
+            <a:r>
+              <a:rPr sz="1600" b="1">
+                <a:solidFill>
+                  <a:srgbClr val="2D6FB3"/>
+                </a:solidFill>
+                <a:latin typeface="Yu Gothic"/>
+              </a:rPr>
+              <a:t>主な根拠資料</a:t>
+            </a:r>
+          </a:p>
+        </p:txBody>
+      </p:sp>
+      <p:sp>
+        <p:nvSpPr>
+          <p:cNvPr id="10" name="TextBox 9"/>
+          <p:cNvSpPr txBox="1"/>
+          <p:nvPr/>
+        </p:nvSpPr>
+        <p:spPr>
+          <a:xfrm>
+            <a:off x="822960" y="1874519"/>
+            <a:ext cx="10607040" cy="1645920"/>
+          </a:xfrm>
+          <a:prstGeom prst="rect">
+            <a:avLst/>
+          </a:prstGeom>
+          <a:noFill/>
+        </p:spPr>
+        <p:txBody>
+          <a:bodyPr wrap="square" lIns="0" rIns="0" tIns="0" bIns="0" anchor="t">
+            <a:spAutoFit/>
+          </a:bodyPr>
+          <a:lstStyle/>
+          <a:p>
+            <a:pPr algn="l">
+              <a:lnSpc>
+                <a:spcPct val="160000"/>
+              </a:lnSpc>
+            </a:pPr>
+            <a:r>
+              <a:rPr sz="1200" b="1">
+                <a:solidFill>
+                  <a:srgbClr val="F5A623"/>
+                </a:solidFill>
+                <a:latin typeface="Yu Gothic"/>
+              </a:rPr>
+              <a:t>■  </a:t>
+            </a:r>
+            <a:r>
+              <a:rPr sz="1400" b="0">
+                <a:solidFill>
+                  <a:srgbClr val="1F2D3D"/>
+                </a:solidFill>
+                <a:latin typeface="Yu Gothic"/>
+              </a:rPr>
+              <a:t>厚生労働省「介護支援専門員資質向上事業ガイドライン」（令和5年4月版、令和6年4月施行）</a:t>
+            </a:r>
+          </a:p>
+          <a:p>
+            <a:pPr algn="l">
+              <a:lnSpc>
+                <a:spcPct val="160000"/>
+              </a:lnSpc>
+            </a:pPr>
+            <a:r>
+              <a:rPr sz="1200" b="1">
+                <a:solidFill>
+                  <a:srgbClr val="F5A623"/>
+                </a:solidFill>
+                <a:latin typeface="Yu Gothic"/>
+              </a:rPr>
+              <a:t>■  </a:t>
+            </a:r>
+            <a:r>
+              <a:rPr sz="1400" b="0">
+                <a:solidFill>
+                  <a:srgbClr val="1F2D3D"/>
+                </a:solidFill>
+                <a:latin typeface="Yu Gothic"/>
+              </a:rPr>
+              <a:t>厚生労働省「主任介護支援専門員更新研修実施要綱」</a:t>
+            </a:r>
+          </a:p>
+          <a:p>
+            <a:pPr algn="l">
+              <a:lnSpc>
+                <a:spcPct val="160000"/>
+              </a:lnSpc>
+            </a:pPr>
+            <a:r>
+              <a:rPr sz="1200" b="1">
+                <a:solidFill>
+                  <a:srgbClr val="F5A623"/>
+                </a:solidFill>
+                <a:latin typeface="Yu Gothic"/>
+              </a:rPr>
+              <a:t>■  </a:t>
+            </a:r>
+            <a:r>
+              <a:rPr sz="1400" b="0">
+                <a:solidFill>
+                  <a:srgbClr val="1F2D3D"/>
+                </a:solidFill>
+                <a:latin typeface="Yu Gothic"/>
+              </a:rPr>
+              <a:t>厚生労働省「介護支援専門員に係るオンライン研修の手引き」等</a:t>
+            </a:r>
+          </a:p>
+        </p:txBody>
+      </p:sp>
+      <p:sp>
+        <p:nvSpPr>
+          <p:cNvPr id="11" name="Rectangle 10"/>
+          <p:cNvSpPr/>
+          <p:nvPr/>
+        </p:nvSpPr>
+        <p:spPr>
+          <a:xfrm>
+            <a:off x="731520" y="3611880"/>
+            <a:ext cx="10698480" cy="1371600"/>
+          </a:xfrm>
+          <a:prstGeom prst="rect">
+            <a:avLst/>
+          </a:prstGeom>
+          <a:solidFill>
+            <a:srgbClr val="FFF8E6"/>
+          </a:solidFill>
+          <a:ln>
+            <a:noFill/>
+          </a:ln>
+          <a:effectLst/>
+        </p:spPr>
+        <p:style>
+          <a:lnRef idx="1">
+            <a:schemeClr val="accent1"/>
+          </a:lnRef>
+          <a:fillRef idx="3">
+            <a:schemeClr val="accent1"/>
+          </a:fillRef>
+          <a:effectRef idx="2">
+            <a:schemeClr val="accent1"/>
+          </a:effectRef>
+          <a:fontRef idx="minor">
+            <a:schemeClr val="lt1"/>
+          </a:fontRef>
+        </p:style>
+        <p:txBody>
+          <a:bodyPr rtlCol="0" anchor="ctr"/>
+          <a:lstStyle/>
+          <a:p>
+            <a:pPr algn="ctr"/>
+          </a:p>
+        </p:txBody>
+      </p:sp>
+      <p:sp>
+        <p:nvSpPr>
+          <p:cNvPr id="12" name="Rectangle 11"/>
+          <p:cNvSpPr/>
+          <p:nvPr/>
+        </p:nvSpPr>
+        <p:spPr>
+          <a:xfrm>
+            <a:off x="731520" y="3611880"/>
+            <a:ext cx="45720" cy="1371600"/>
+          </a:xfrm>
+          <a:prstGeom prst="rect">
+            <a:avLst/>
+          </a:prstGeom>
+          <a:solidFill>
+            <a:srgbClr val="F5A623"/>
+          </a:solidFill>
+          <a:ln>
+            <a:noFill/>
+          </a:ln>
+          <a:effectLst/>
+        </p:spPr>
+        <p:style>
+          <a:lnRef idx="1">
+            <a:schemeClr val="accent1"/>
+          </a:lnRef>
+          <a:fillRef idx="3">
+            <a:schemeClr val="accent1"/>
+          </a:fillRef>
+          <a:effectRef idx="2">
+            <a:schemeClr val="accent1"/>
+          </a:effectRef>
+          <a:fontRef idx="minor">
+            <a:schemeClr val="lt1"/>
+          </a:fontRef>
+        </p:style>
+        <p:txBody>
+          <a:bodyPr rtlCol="0" anchor="ctr"/>
+          <a:lstStyle/>
+          <a:p>
+            <a:pPr algn="ctr"/>
+          </a:p>
+        </p:txBody>
+      </p:sp>
+      <p:sp>
+        <p:nvSpPr>
+          <p:cNvPr id="13" name="TextBox 12"/>
+          <p:cNvSpPr txBox="1"/>
+          <p:nvPr/>
+        </p:nvSpPr>
+        <p:spPr>
+          <a:xfrm>
+            <a:off x="960120" y="3749040"/>
+            <a:ext cx="10332720" cy="1188720"/>
+          </a:xfrm>
+          <a:prstGeom prst="rect">
+            <a:avLst/>
+          </a:prstGeom>
+          <a:noFill/>
+        </p:spPr>
+        <p:txBody>
+          <a:bodyPr wrap="square" lIns="0" rIns="0" tIns="0" bIns="0" anchor="ctr">
+            <a:spAutoFit/>
+          </a:bodyPr>
+          <a:lstStyle/>
+          <a:p>
+            <a:pPr algn="l">
+              <a:lnSpc>
+                <a:spcPct val="140000"/>
+              </a:lnSpc>
+            </a:pPr>
+            <a:r>
+              <a:rPr sz="1400" b="1">
+                <a:solidFill>
+                  <a:srgbClr val="6B4E00"/>
+                </a:solidFill>
+                <a:latin typeface="Yu Gothic"/>
+              </a:rPr>
+              <a:t>利用上の注意：</a:t>
+            </a:r>
+            <a:r>
+              <a:rPr sz="1400" b="0">
+                <a:solidFill>
+                  <a:srgbClr val="6B4E00"/>
+                </a:solidFill>
+                <a:latin typeface="Yu Gothic"/>
+              </a:rPr>
+              <a:t>本資料は、上記ガイドラインおよび更新研修実施要綱を踏まえた実務整理である。実際の受講要件・募集時期・実施方法・オンライン研修の取扱いは、各都道府県および研修実施機関の最新通知を必ず確認すること。</a:t>
+            </a:r>
+          </a:p>
+        </p:txBody>
+      </p:sp>
+      <p:sp>
+        <p:nvSpPr>
+          <p:cNvPr id="14" name="TextBox 13"/>
+          <p:cNvSpPr txBox="1"/>
+          <p:nvPr/>
+        </p:nvSpPr>
+        <p:spPr>
+          <a:xfrm>
+            <a:off x="731520" y="5120640"/>
+            <a:ext cx="10698480" cy="365760"/>
+          </a:xfrm>
+          <a:prstGeom prst="rect">
+            <a:avLst/>
+          </a:prstGeom>
+          <a:noFill/>
+        </p:spPr>
+        <p:txBody>
+          <a:bodyPr wrap="square" lIns="0" rIns="0" tIns="0" bIns="0" anchor="t">
+            <a:spAutoFit/>
+          </a:bodyPr>
+          <a:lstStyle/>
+          <a:p>
+            <a:pPr algn="l"/>
+            <a:r>
+              <a:rPr sz="1600" b="1">
+                <a:solidFill>
+                  <a:srgbClr val="2D6FB3"/>
+                </a:solidFill>
+                <a:latin typeface="Yu Gothic"/>
+              </a:rPr>
+              <a:t>本資料の位置づけ</a:t>
+            </a:r>
+          </a:p>
+        </p:txBody>
+      </p:sp>
+      <p:sp>
+        <p:nvSpPr>
+          <p:cNvPr id="15" name="TextBox 14"/>
+          <p:cNvSpPr txBox="1"/>
+          <p:nvPr/>
+        </p:nvSpPr>
+        <p:spPr>
+          <a:xfrm>
+            <a:off x="822960" y="5532120"/>
+            <a:ext cx="10607040" cy="822960"/>
+          </a:xfrm>
+          <a:prstGeom prst="rect">
+            <a:avLst/>
+          </a:prstGeom>
+          <a:noFill/>
+        </p:spPr>
+        <p:txBody>
+          <a:bodyPr wrap="square" lIns="0" rIns="0" tIns="0" bIns="0" anchor="t">
+            <a:spAutoFit/>
+          </a:bodyPr>
+          <a:lstStyle/>
+          <a:p>
+            <a:pPr algn="l">
+              <a:lnSpc>
+                <a:spcPct val="140000"/>
+              </a:lnSpc>
+            </a:pPr>
+            <a:r>
+              <a:rPr sz="1200" b="1">
+                <a:solidFill>
+                  <a:srgbClr val="F5A623"/>
+                </a:solidFill>
+                <a:latin typeface="Yu Gothic"/>
+              </a:rPr>
+              <a:t>■  </a:t>
+            </a:r>
+            <a:r>
+              <a:rPr sz="1300" b="0">
+                <a:solidFill>
+                  <a:srgbClr val="1F2D3D"/>
+                </a:solidFill>
+                <a:latin typeface="Yu Gothic"/>
+              </a:rPr>
+              <a:t>事業所内研修・管理者向け勉強会の素材として作成</a:t>
+            </a:r>
+          </a:p>
+          <a:p>
+            <a:pPr algn="l">
+              <a:lnSpc>
+                <a:spcPct val="140000"/>
+              </a:lnSpc>
+            </a:pPr>
+            <a:r>
+              <a:rPr sz="1200" b="1">
+                <a:solidFill>
+                  <a:srgbClr val="F5A623"/>
+                </a:solidFill>
+                <a:latin typeface="Yu Gothic"/>
+              </a:rPr>
+              <a:t>■  </a:t>
+            </a:r>
+            <a:r>
+              <a:rPr sz="1300" b="0">
+                <a:solidFill>
+                  <a:srgbClr val="1F2D3D"/>
+                </a:solidFill>
+                <a:latin typeface="Yu Gothic"/>
+              </a:rPr>
+              <a:t>第5章のモデルケースは解説目的の架空事例</a:t>
+            </a:r>
+          </a:p>
+          <a:p>
+            <a:pPr algn="l">
+              <a:lnSpc>
+                <a:spcPct val="140000"/>
+              </a:lnSpc>
+            </a:pPr>
+            <a:r>
+              <a:rPr sz="1200" b="1">
+                <a:solidFill>
+                  <a:srgbClr val="F5A623"/>
+                </a:solidFill>
+                <a:latin typeface="Yu Gothic"/>
+              </a:rPr>
+              <a:t>■  </a:t>
+            </a:r>
+            <a:r>
+              <a:rPr sz="1300" b="0">
+                <a:solidFill>
+                  <a:srgbClr val="1F2D3D"/>
+                </a:solidFill>
+                <a:latin typeface="Yu Gothic"/>
+              </a:rPr>
+              <a:t>キャリアパス・経験年数区分は事業所モデルの例であり法令上の基準ではない</a:t>
+            </a:r>
+          </a:p>
+        </p:txBody>
+      </p:sp>
+    </p:spTree>
+  </p:cSld>
+  <p:clrMapOvr>
+    <a:masterClrMapping/>
+  </p:clrMapOvr>
+</p:sld>
+</file>
+
+<file path=ppt/slides/slide21.xml><?xml version="1.0" encoding="utf-8"?>
+<p:sld xmlns:a="http://schemas.openxmlformats.org/drawingml/2006/main" xmlns:p="http://schemas.openxmlformats.org/presentationml/2006/main" xmlns:r="http://schemas.openxmlformats.org/officeDocument/2006/relationships">
+  <p:cSld>
+    <p:spTree>
+      <p:nvGrpSpPr>
+        <p:cNvPr id="1" name=""/>
+        <p:cNvGrpSpPr/>
+        <p:nvPr/>
+      </p:nvGrpSpPr>
+      <p:grpSpPr/>
+      <p:sp>
+        <p:nvSpPr>
+          <p:cNvPr id="2" name="Rectangle 1"/>
+          <p:cNvSpPr/>
+          <p:nvPr/>
+        </p:nvSpPr>
+        <p:spPr>
+          <a:xfrm>
+            <a:off x="0" y="0"/>
+            <a:ext cx="12191695" cy="6858000"/>
+          </a:xfrm>
+          <a:prstGeom prst="rect">
+            <a:avLst/>
+          </a:prstGeom>
+          <a:solidFill>
+            <a:srgbClr val="0F4C81"/>
+          </a:solidFill>
+          <a:ln>
+            <a:noFill/>
+          </a:ln>
+          <a:effectLst/>
+        </p:spPr>
+        <p:style>
+          <a:lnRef idx="1">
+            <a:schemeClr val="accent1"/>
+          </a:lnRef>
+          <a:fillRef idx="3">
+            <a:schemeClr val="accent1"/>
+          </a:fillRef>
+          <a:effectRef idx="2">
+            <a:schemeClr val="accent1"/>
+          </a:effectRef>
+          <a:fontRef idx="minor">
+            <a:schemeClr val="lt1"/>
+          </a:fontRef>
+        </p:style>
+        <p:txBody>
+          <a:bodyPr rtlCol="0" anchor="ctr"/>
+          <a:lstStyle/>
+          <a:p>
+            <a:pPr algn="ctr"/>
+          </a:p>
+        </p:txBody>
+      </p:sp>
+      <p:sp>
+        <p:nvSpPr>
+          <p:cNvPr id="3" name="Rectangle 2"/>
+          <p:cNvSpPr/>
+          <p:nvPr/>
+        </p:nvSpPr>
+        <p:spPr>
+          <a:xfrm>
+            <a:off x="0" y="6492240"/>
+            <a:ext cx="12191695" cy="365760"/>
+          </a:xfrm>
+          <a:prstGeom prst="rect">
+            <a:avLst/>
+          </a:prstGeom>
+          <a:solidFill>
+            <a:srgbClr val="F5A623"/>
+          </a:solidFill>
+          <a:ln>
+            <a:noFill/>
+          </a:ln>
+          <a:effectLst/>
+        </p:spPr>
+        <p:style>
+          <a:lnRef idx="1">
+            <a:schemeClr val="accent1"/>
+          </a:lnRef>
+          <a:fillRef idx="3">
+            <a:schemeClr val="accent1"/>
+          </a:fillRef>
+          <a:effectRef idx="2">
+            <a:schemeClr val="accent1"/>
+          </a:effectRef>
+          <a:fontRef idx="minor">
+            <a:schemeClr val="lt1"/>
+          </a:fontRef>
+        </p:style>
+        <p:txBody>
+          <a:bodyPr rtlCol="0" anchor="ctr"/>
+          <a:lstStyle/>
+          <a:p>
+            <a:pPr algn="ctr"/>
+          </a:p>
+        </p:txBody>
+      </p:sp>
+      <p:sp>
+        <p:nvSpPr>
+          <p:cNvPr id="4" name="TextBox 3"/>
+          <p:cNvSpPr txBox="1"/>
+          <p:nvPr/>
+        </p:nvSpPr>
+        <p:spPr>
+          <a:xfrm>
             <a:off x="914400" y="1280160"/>
             <a:ext cx="10332720" cy="1097280"/>
           </a:xfrm>
@@ -15737,7 +16509,7 @@
                 </a:solidFill>
                 <a:latin typeface="Yu Gothic"/>
               </a:rPr>
-              <a:t>20 / 20</a:t>
+              <a:t>21 / 21</a:t>
             </a:r>
           </a:p>
         </p:txBody>
@@ -15992,7 +16764,7 @@
                 </a:solidFill>
                 <a:latin typeface="Yu Gothic"/>
               </a:rPr>
-              <a:t>3 / 20</a:t>
+              <a:t>3 / 21</a:t>
             </a:r>
           </a:p>
         </p:txBody>
@@ -17183,7 +17955,7 @@
                 </a:solidFill>
                 <a:latin typeface="Yu Gothic"/>
               </a:rPr>
-              <a:t>4 / 20</a:t>
+              <a:t>4 / 21</a:t>
             </a:r>
           </a:p>
         </p:txBody>
@@ -17262,7 +18034,7 @@
                 </a:solidFill>
                 <a:latin typeface="Yu Gothic"/>
               </a:rPr>
-              <a:t>段階的な施行スケジュール</a:t>
+              <a:t>施行と運用</a:t>
             </a:r>
           </a:p>
         </p:txBody>
@@ -17387,7 +18159,7 @@
                 </a:solidFill>
                 <a:latin typeface="Yu Gothic"/>
               </a:rPr>
-              <a:t>令和6年度〜</a:t>
+              <a:t>令和5年4月</a:t>
             </a:r>
           </a:p>
         </p:txBody>
@@ -17422,7 +18194,7 @@
                 </a:solidFill>
                 <a:latin typeface="Yu Gothic"/>
               </a:rPr>
-              <a:t>新ガイドラインに基づく研修開始、eラーニング科目の本格導入</a:t>
+              <a:t>厚労省「介護支援専門員資質向上事業ガイドライン」公表</a:t>
             </a:r>
           </a:p>
         </p:txBody>
@@ -17503,7 +18275,7 @@
                 </a:solidFill>
                 <a:latin typeface="Yu Gothic"/>
               </a:rPr>
-              <a:t>令和7年度〜</a:t>
+              <a:t>令和6年4月</a:t>
             </a:r>
           </a:p>
         </p:txBody>
@@ -17538,7 +18310,7 @@
                 </a:solidFill>
                 <a:latin typeface="Yu Gothic"/>
               </a:rPr>
-              <a:t>都道府県ごとに新カリキュラム順次移行</a:t>
+              <a:t>新ガイドライン施行。オンライン研修は手引き等を踏まえ各実施機関が活用</a:t>
             </a:r>
           </a:p>
         </p:txBody>
@@ -17619,7 +18391,7 @@
                 </a:solidFill>
                 <a:latin typeface="Yu Gothic"/>
               </a:rPr>
-              <a:t>令和8年度〜</a:t>
+              <a:t>運用</a:t>
             </a:r>
           </a:p>
         </p:txBody>
@@ -17654,7 +18426,7 @@
                 </a:solidFill>
                 <a:latin typeface="Yu Gothic"/>
               </a:rPr>
-              <a:t>新体系への完全移行を目指す</a:t>
+              <a:t>実際の研修実施時期・運用は都道府県ごとの募集要項を確認</a:t>
             </a:r>
           </a:p>
         </p:txBody>
@@ -17668,7 +18440,7 @@
         <p:spPr>
           <a:xfrm>
             <a:off x="731520" y="5212080"/>
-            <a:ext cx="5212080" cy="548640"/>
+            <a:ext cx="5212080" cy="731520"/>
           </a:xfrm>
           <a:prstGeom prst="rect">
             <a:avLst/>
@@ -17689,7 +18461,7 @@
                 </a:solidFill>
                 <a:latin typeface="Yu Gothic"/>
               </a:rPr>
-              <a:t>※施行時期・移行方法は都道府県により異なるため、所管自治体の通知を確認のこと。</a:t>
+              <a:t>※施行時期・募集回数・運用方法は都道府県・実施機関により異なるため、所管自治体の最新通知を必ず確認のこと。</a:t>
             </a:r>
           </a:p>
         </p:txBody>
@@ -18327,7 +19099,7 @@
                 </a:solidFill>
                 <a:latin typeface="Yu Gothic"/>
               </a:rPr>
-              <a:t>5 / 20</a:t>
+              <a:t>5 / 21</a:t>
             </a:r>
           </a:p>
         </p:txBody>
@@ -18814,7 +19586,7 @@
                 </a:solidFill>
                 <a:latin typeface="Yu Gothic"/>
               </a:rPr>
-              <a:t>eラーニング拡大</a:t>
+              <a:t>オンライン研修活用</a:t>
             </a:r>
           </a:p>
         </p:txBody>
@@ -18849,7 +19621,7 @@
                 </a:solidFill>
                 <a:latin typeface="Yu Gothic"/>
               </a:rPr>
-              <a:t>知識習得はオンライン化。集合研修は演習・対話中心に。</a:t>
+              <a:t>知識習得部分はオンライン化が進展。集合研修は演習・対話中心に。</a:t>
             </a:r>
           </a:p>
         </p:txBody>
@@ -19088,7 +19860,7 @@
                 </a:solidFill>
                 <a:latin typeface="Yu Gothic"/>
               </a:rPr>
-              <a:t>疾患別・状態別の標準的支援を全課程で位置づけ。</a:t>
+              <a:t>適切なケアマネジメント手法を踏まえた実践的な視点が重視。</a:t>
             </a:r>
           </a:p>
         </p:txBody>
@@ -19531,7 +20303,7 @@
                 </a:solidFill>
                 <a:latin typeface="Yu Gothic"/>
               </a:rPr>
-              <a:t>評価の改善</a:t>
+              <a:t>評価・振り返り</a:t>
             </a:r>
           </a:p>
         </p:txBody>
@@ -19566,7 +20338,7 @@
                 </a:solidFill>
                 <a:latin typeface="Yu Gothic"/>
               </a:rPr>
-              <a:t>形成的評価（修了後のフォロー）を導入。</a:t>
+              <a:t>研修記録シート・修了評価等で到達目標の確認・振り返りを重視。</a:t>
             </a:r>
           </a:p>
         </p:txBody>
@@ -19843,7 +20615,7 @@
                 </a:solidFill>
                 <a:latin typeface="Yu Gothic"/>
               </a:rPr>
-              <a:t>eラーニング活用の留意点</a:t>
+              <a:t>オンライン研修活用の留意点</a:t>
             </a:r>
           </a:p>
         </p:txBody>
@@ -19957,7 +20729,7 @@
                 </a:solidFill>
                 <a:latin typeface="Yu Gothic"/>
               </a:rPr>
-              <a:t>6 / 20</a:t>
+              <a:t>6 / 21</a:t>
             </a:r>
           </a:p>
         </p:txBody>
@@ -20885,7 +21657,7 @@
                 </a:solidFill>
                 <a:latin typeface="Yu Gothic"/>
               </a:rPr>
-              <a:t>7 / 20</a:t>
+              <a:t>7 / 21</a:t>
             </a:r>
           </a:p>
         </p:txBody>
@@ -20979,7 +21751,7 @@
         </p:nvGraphicFramePr>
         <p:xfrm>
           <a:off x="731520" y="1874519"/>
-          <a:ext cx="10698480" cy="2103120"/>
+          <a:ext cx="10698480" cy="2377440"/>
         </p:xfrm>
         <a:graphic>
           <a:graphicData uri="http://schemas.openxmlformats.org/drawingml/2006/table">
@@ -20991,7 +21763,7 @@
                 <a:gridCol w="2674620"/>
                 <a:gridCol w="8023860"/>
               </a:tblGrid>
-              <a:tr h="420624">
+              <a:tr h="475488">
                 <a:tc>
                   <a:txBody>
                     <a:bodyPr wrap="square"/>
@@ -21037,7 +21809,7 @@
                   </a:tcPr>
                 </a:tc>
               </a:tr>
-              <a:tr h="420624">
+              <a:tr h="475488">
                 <a:tc>
                   <a:txBody>
                     <a:bodyPr wrap="square"/>
@@ -21092,7 +21864,7 @@
                   </a:tcPr>
                 </a:tc>
               </a:tr>
-              <a:tr h="420624">
+              <a:tr h="475488">
                 <a:tc>
                   <a:txBody>
                     <a:bodyPr wrap="square"/>
@@ -21127,7 +21899,7 @@
                           </a:solidFill>
                           <a:latin typeface="Yu Gothic"/>
                         </a:rPr>
-                        <a:t>概ね </a:t>
+                        <a:t>国の実施要綱上、合計 </a:t>
                       </a:r>
                       <a:r>
                         <a:rPr sz="1100" b="1">
@@ -21136,7 +21908,7 @@
                           </a:solidFill>
                           <a:latin typeface="Yu Gothic"/>
                         </a:rPr>
-                        <a:t>46時間</a:t>
+                        <a:t>46時間以上</a:t>
                       </a:r>
                       <a:r>
                         <a:rPr sz="1100" b="0">
@@ -21156,7 +21928,7 @@
                   </a:tcPr>
                 </a:tc>
               </a:tr>
-              <a:tr h="420624">
+              <a:tr h="475488">
                 <a:tc>
                   <a:txBody>
                     <a:bodyPr wrap="square"/>
@@ -21191,7 +21963,7 @@
                           </a:solidFill>
                           <a:latin typeface="Yu Gothic"/>
                         </a:rPr>
-                        <a:t>主任ケアマネとしての一定の実務経験／指導実績 等</a:t>
+                        <a:t>都道府県により異なる。国の要綱では、研修の企画・講師・ファシリテーター経験、法定外研修への年4回以上の参加、学会発表、認定ケアマネジャー、都道府県が適当と認める者等が例示</a:t>
                       </a:r>
                     </a:p>
                   </a:txBody>
@@ -21202,7 +21974,7 @@
                   </a:tcPr>
                 </a:tc>
               </a:tr>
-              <a:tr h="420624">
+              <a:tr h="475488">
                 <a:tc>
                   <a:txBody>
                     <a:bodyPr wrap="square"/>
@@ -21237,7 +22009,7 @@
                           </a:solidFill>
                           <a:latin typeface="Yu Gothic"/>
                         </a:rPr>
-                        <a:t>主任ケアマネの資格失効 → </a:t>
+                        <a:t>主任介護支援専門員の配置要件に影響し、</a:t>
                       </a:r>
                       <a:r>
                         <a:rPr sz="1100" b="1">
@@ -21246,7 +22018,7 @@
                           </a:solidFill>
                           <a:latin typeface="Yu Gothic"/>
                         </a:rPr>
-                        <a:t>特定事業所加算・包括センター人員要件</a:t>
+                        <a:t>特定事業所加算や地域包括支援センターの人員体制</a:t>
                       </a:r>
                       <a:r>
                         <a:rPr sz="1100" b="0">
@@ -21255,7 +22027,7 @@
                           </a:solidFill>
                           <a:latin typeface="Yu Gothic"/>
                         </a:rPr>
-                        <a:t>に直撃</a:t>
+                        <a:t>に支障が生じる可能性</a:t>
                       </a:r>
                     </a:p>
                   </a:txBody>
@@ -21278,7 +22050,7 @@
         </p:nvSpPr>
         <p:spPr>
           <a:xfrm>
-            <a:off x="731520" y="4297680"/>
+            <a:off x="731520" y="4526280"/>
             <a:ext cx="10698480" cy="1554480"/>
           </a:xfrm>
           <a:prstGeom prst="rect">
@@ -21322,7 +22094,7 @@
         </p:nvSpPr>
         <p:spPr>
           <a:xfrm>
-            <a:off x="731520" y="4297680"/>
+            <a:off x="731520" y="4526280"/>
             <a:ext cx="45720" cy="1554480"/>
           </a:xfrm>
           <a:prstGeom prst="rect">
@@ -21366,7 +22138,7 @@
         </p:nvSpPr>
         <p:spPr>
           <a:xfrm>
-            <a:off x="960120" y="4434840"/>
+            <a:off x="960120" y="4663440"/>
             <a:ext cx="10332720" cy="1371600"/>
           </a:xfrm>
           <a:prstGeom prst="rect">
@@ -21401,7 +22173,7 @@
                 </a:solidFill>
                 <a:latin typeface="Yu Gothic"/>
               </a:rPr>
-              <a:t>主任ケアマネが1名でも失効すると、特定事業所加算（I・II）や地域包括支援センターの三職種要件が満たせなくなる可能性。事業所収益・指定要件に直結する重大リスク。</a:t>
+              <a:t>主任ケアマネが失効した場合、事業所の主任配置数・加算区分等によっては、特定事業所加算や地域包括支援センターの人員体制に支障が生じる可能性がある。事業所運営に関わるリスクとして管理が必要。</a:t>
             </a:r>
           </a:p>
         </p:txBody>
@@ -21656,7 +22428,7 @@
                 </a:solidFill>
                 <a:latin typeface="Yu Gothic"/>
               </a:rPr>
-              <a:t>8 / 20</a:t>
+              <a:t>8 / 21</a:t>
             </a:r>
           </a:p>
         </p:txBody>
@@ -22071,7 +22843,7 @@
                 </a:solidFill>
                 <a:latin typeface="Yu Gothic"/>
               </a:rPr>
-              <a:t>都道府県開催で年1〜2回。定員制で抽選のことも</a:t>
+              <a:t>開催回数・定員・選考方法は都道府県・実施機関により異なる</a:t>
             </a:r>
           </a:p>
           <a:p>
@@ -22747,7 +23519,7 @@
                 </a:solidFill>
                 <a:latin typeface="Yu Gothic"/>
               </a:rPr>
-              <a:t>9 / 20</a:t>
+              <a:t>9 / 21</a:t>
             </a:r>
           </a:p>
         </p:txBody>
